--- a/Шаблон презентации ИС-235 УП.pptx
+++ b/Шаблон презентации ИС-235 УП.pptx
@@ -145,7 +145,7 @@
       </p:grpSpPr>
       <p:sp>
         <p:nvSpPr>
-          <p:cNvPr id="111520724" name="Верхний колонтитул 1"/>
+          <p:cNvPr id="2075271840" name="Верхний колонтитул 1"/>
           <p:cNvSpPr>
             <a:spLocks noGrp="1"/>
           </p:cNvSpPr>
@@ -179,7 +179,7 @@
       </p:sp>
       <p:sp>
         <p:nvSpPr>
-          <p:cNvPr id="871174675" name="Дата 2"/>
+          <p:cNvPr id="977407463" name="Дата 2"/>
           <p:cNvSpPr>
             <a:spLocks noGrp="1"/>
           </p:cNvSpPr>
@@ -217,7 +217,7 @@
       </p:sp>
       <p:sp>
         <p:nvSpPr>
-          <p:cNvPr id="1971460289" name="Образ слайда 3"/>
+          <p:cNvPr id="1890047894" name="Образ слайда 3"/>
           <p:cNvSpPr>
             <a:spLocks noChangeAspect="1" noGrp="1" noRot="1"/>
           </p:cNvSpPr>
@@ -253,7 +253,7 @@
       </p:sp>
       <p:sp>
         <p:nvSpPr>
-          <p:cNvPr id="634944198" name="Заметки 4"/>
+          <p:cNvPr id="204828060" name="Заметки 4"/>
           <p:cNvSpPr>
             <a:spLocks noGrp="1"/>
           </p:cNvSpPr>
@@ -327,7 +327,7 @@
       </p:sp>
       <p:sp>
         <p:nvSpPr>
-          <p:cNvPr id="460898292" name="Нижний колонтитул 5"/>
+          <p:cNvPr id="836339661" name="Нижний колонтитул 5"/>
           <p:cNvSpPr>
             <a:spLocks noGrp="1"/>
           </p:cNvSpPr>
@@ -361,7 +361,7 @@
       </p:sp>
       <p:sp>
         <p:nvSpPr>
-          <p:cNvPr id="2124622472" name="Номер слайда 6"/>
+          <p:cNvPr id="1699596300" name="Номер слайда 6"/>
           <p:cNvSpPr>
             <a:spLocks noGrp="1"/>
           </p:cNvSpPr>
@@ -514,7 +514,7 @@
       </p:grpSpPr>
       <p:sp>
         <p:nvSpPr>
-          <p:cNvPr id="444979601" name="Образ слайда 1"/>
+          <p:cNvPr id="1588015756" name="Образ слайда 1"/>
           <p:cNvSpPr>
             <a:spLocks noChangeAspect="1" noGrp="1" noRot="1"/>
           </p:cNvSpPr>
@@ -526,7 +526,7 @@
       </p:sp>
       <p:sp>
         <p:nvSpPr>
-          <p:cNvPr id="1691212627" name="Заметки 2"/>
+          <p:cNvPr id="1337049385" name="Заметки 2"/>
           <p:cNvSpPr>
             <a:spLocks noGrp="1"/>
           </p:cNvSpPr>
@@ -548,7 +548,7 @@
       </p:sp>
       <p:sp>
         <p:nvSpPr>
-          <p:cNvPr id="1079000437" name="Номер слайда 3"/>
+          <p:cNvPr id="301767200" name="Номер слайда 3"/>
           <p:cNvSpPr>
             <a:spLocks noGrp="1"/>
           </p:cNvSpPr>
@@ -599,7 +599,7 @@
       </p:grpSpPr>
       <p:sp>
         <p:nvSpPr>
-          <p:cNvPr id="1110849556" name="Образ слайда 1"/>
+          <p:cNvPr id="1598932358" name="Образ слайда 1"/>
           <p:cNvSpPr>
             <a:spLocks noChangeAspect="1" noGrp="1" noRot="1"/>
           </p:cNvSpPr>
@@ -611,7 +611,7 @@
       </p:sp>
       <p:sp>
         <p:nvSpPr>
-          <p:cNvPr id="151356500" name="Заметки 2"/>
+          <p:cNvPr id="1409000003" name="Заметки 2"/>
           <p:cNvSpPr>
             <a:spLocks noGrp="1"/>
           </p:cNvSpPr>
@@ -646,7 +646,7 @@
       </p:sp>
       <p:sp>
         <p:nvSpPr>
-          <p:cNvPr id="481513901" name="Номер слайда 3"/>
+          <p:cNvPr id="1279673334" name="Номер слайда 3"/>
           <p:cNvSpPr>
             <a:spLocks noGrp="1"/>
           </p:cNvSpPr>
@@ -697,7 +697,7 @@
       </p:grpSpPr>
       <p:sp>
         <p:nvSpPr>
-          <p:cNvPr id="994524977" name="Образ слайда 1"/>
+          <p:cNvPr id="853149159" name="Образ слайда 1"/>
           <p:cNvSpPr>
             <a:spLocks noChangeAspect="1" noGrp="1" noRot="1"/>
           </p:cNvSpPr>
@@ -709,7 +709,7 @@
       </p:sp>
       <p:sp>
         <p:nvSpPr>
-          <p:cNvPr id="1023963541" name="Заметки 2"/>
+          <p:cNvPr id="1527193789" name="Заметки 2"/>
           <p:cNvSpPr>
             <a:spLocks noGrp="1"/>
           </p:cNvSpPr>
@@ -744,7 +744,7 @@
       </p:sp>
       <p:sp>
         <p:nvSpPr>
-          <p:cNvPr id="1766185506" name="Номер слайда 3"/>
+          <p:cNvPr id="2017281163" name="Номер слайда 3"/>
           <p:cNvSpPr>
             <a:spLocks noGrp="1"/>
           </p:cNvSpPr>
@@ -795,7 +795,7 @@
       </p:grpSpPr>
       <p:sp>
         <p:nvSpPr>
-          <p:cNvPr id="807020645" name="Slide Image Placeholder 1"/>
+          <p:cNvPr id="1702098416" name="Slide Image Placeholder 1"/>
           <p:cNvSpPr>
             <a:spLocks noChangeAspect="1" noGrp="1" noRot="1"/>
           </p:cNvSpPr>
@@ -807,7 +807,7 @@
       </p:sp>
       <p:sp>
         <p:nvSpPr>
-          <p:cNvPr id="1129066219" name="Notes Placeholder 2"/>
+          <p:cNvPr id="991301253" name="Notes Placeholder 2"/>
           <p:cNvSpPr>
             <a:spLocks noGrp="1"/>
           </p:cNvSpPr>
@@ -829,7 +829,7 @@
       </p:sp>
       <p:sp>
         <p:nvSpPr>
-          <p:cNvPr id="2121822136" name="Slide Number Placeholder 3"/>
+          <p:cNvPr id="1614903808" name="Slide Number Placeholder 3"/>
           <p:cNvSpPr>
             <a:spLocks noGrp="1"/>
           </p:cNvSpPr>
@@ -880,7 +880,7 @@
       </p:grpSpPr>
       <p:sp>
         <p:nvSpPr>
-          <p:cNvPr id="1881972394" name="Образ слайда 1"/>
+          <p:cNvPr id="985850554" name="Образ слайда 1"/>
           <p:cNvSpPr>
             <a:spLocks noChangeAspect="1" noGrp="1" noRot="1"/>
           </p:cNvSpPr>
@@ -892,7 +892,7 @@
       </p:sp>
       <p:sp>
         <p:nvSpPr>
-          <p:cNvPr id="2022151061" name="Заметки 2"/>
+          <p:cNvPr id="1693946894" name="Заметки 2"/>
           <p:cNvSpPr>
             <a:spLocks noGrp="1"/>
           </p:cNvSpPr>
@@ -927,7 +927,7 @@
       </p:sp>
       <p:sp>
         <p:nvSpPr>
-          <p:cNvPr id="1703248154" name="Номер слайда 3"/>
+          <p:cNvPr id="103372523" name="Номер слайда 3"/>
           <p:cNvSpPr>
             <a:spLocks noGrp="1"/>
           </p:cNvSpPr>
@@ -978,7 +978,7 @@
       </p:grpSpPr>
       <p:sp>
         <p:nvSpPr>
-          <p:cNvPr id="2026142295" name="Образ слайда 1"/>
+          <p:cNvPr id="168866779" name="Образ слайда 1"/>
           <p:cNvSpPr>
             <a:spLocks noChangeAspect="1" noGrp="1" noRot="1"/>
           </p:cNvSpPr>
@@ -990,7 +990,7 @@
       </p:sp>
       <p:sp>
         <p:nvSpPr>
-          <p:cNvPr id="93167349" name="Заметки 2"/>
+          <p:cNvPr id="1085591114" name="Заметки 2"/>
           <p:cNvSpPr>
             <a:spLocks noGrp="1"/>
           </p:cNvSpPr>
@@ -1025,7 +1025,7 @@
       </p:sp>
       <p:sp>
         <p:nvSpPr>
-          <p:cNvPr id="1784330081" name="Номер слайда 3"/>
+          <p:cNvPr id="841951580" name="Номер слайда 3"/>
           <p:cNvSpPr>
             <a:spLocks noGrp="1"/>
           </p:cNvSpPr>
@@ -1076,7 +1076,7 @@
       </p:grpSpPr>
       <p:sp>
         <p:nvSpPr>
-          <p:cNvPr id="716689918" name="Образ слайда 1"/>
+          <p:cNvPr id="822262433" name="Образ слайда 1"/>
           <p:cNvSpPr>
             <a:spLocks noChangeAspect="1" noGrp="1" noRot="1"/>
           </p:cNvSpPr>
@@ -1088,7 +1088,7 @@
       </p:sp>
       <p:sp>
         <p:nvSpPr>
-          <p:cNvPr id="1896911084" name="Заметки 2"/>
+          <p:cNvPr id="1007911983" name="Заметки 2"/>
           <p:cNvSpPr>
             <a:spLocks noGrp="1"/>
           </p:cNvSpPr>
@@ -1123,7 +1123,7 @@
       </p:sp>
       <p:sp>
         <p:nvSpPr>
-          <p:cNvPr id="306531213" name="Номер слайда 3"/>
+          <p:cNvPr id="1495449182" name="Номер слайда 3"/>
           <p:cNvSpPr>
             <a:spLocks noGrp="1"/>
           </p:cNvSpPr>
@@ -1174,7 +1174,7 @@
       </p:grpSpPr>
       <p:sp>
         <p:nvSpPr>
-          <p:cNvPr id="2013944872" name="Образ слайда 1"/>
+          <p:cNvPr id="739671393" name="Образ слайда 1"/>
           <p:cNvSpPr>
             <a:spLocks noChangeAspect="1" noGrp="1" noRot="1"/>
           </p:cNvSpPr>
@@ -1186,7 +1186,7 @@
       </p:sp>
       <p:sp>
         <p:nvSpPr>
-          <p:cNvPr id="318880956" name="Заметки 2"/>
+          <p:cNvPr id="782800636" name="Заметки 2"/>
           <p:cNvSpPr>
             <a:spLocks noGrp="1"/>
           </p:cNvSpPr>
@@ -1221,7 +1221,7 @@
       </p:sp>
       <p:sp>
         <p:nvSpPr>
-          <p:cNvPr id="591511071" name="Номер слайда 3"/>
+          <p:cNvPr id="2094301683" name="Номер слайда 3"/>
           <p:cNvSpPr>
             <a:spLocks noGrp="1"/>
           </p:cNvSpPr>
@@ -1272,7 +1272,7 @@
       </p:grpSpPr>
       <p:sp>
         <p:nvSpPr>
-          <p:cNvPr id="269197568" name="Образ слайда 1"/>
+          <p:cNvPr id="1485772395" name="Образ слайда 1"/>
           <p:cNvSpPr>
             <a:spLocks noChangeAspect="1" noGrp="1" noRot="1"/>
           </p:cNvSpPr>
@@ -1284,7 +1284,7 @@
       </p:sp>
       <p:sp>
         <p:nvSpPr>
-          <p:cNvPr id="1002989157" name="Заметки 2"/>
+          <p:cNvPr id="1874948366" name="Заметки 2"/>
           <p:cNvSpPr>
             <a:spLocks noGrp="1"/>
           </p:cNvSpPr>
@@ -1319,7 +1319,7 @@
       </p:sp>
       <p:sp>
         <p:nvSpPr>
-          <p:cNvPr id="1445298771" name="Номер слайда 3"/>
+          <p:cNvPr id="474111303" name="Номер слайда 3"/>
           <p:cNvSpPr>
             <a:spLocks noGrp="1"/>
           </p:cNvSpPr>
@@ -1370,7 +1370,7 @@
       </p:grpSpPr>
       <p:sp>
         <p:nvSpPr>
-          <p:cNvPr id="1525485294" name="Образ слайда 1"/>
+          <p:cNvPr id="500680242" name="Образ слайда 1"/>
           <p:cNvSpPr>
             <a:spLocks noChangeAspect="1" noGrp="1" noRot="1"/>
           </p:cNvSpPr>
@@ -1382,7 +1382,7 @@
       </p:sp>
       <p:sp>
         <p:nvSpPr>
-          <p:cNvPr id="708499491" name="Заметки 2"/>
+          <p:cNvPr id="1839801792" name="Заметки 2"/>
           <p:cNvSpPr>
             <a:spLocks noGrp="1"/>
           </p:cNvSpPr>
@@ -1417,7 +1417,7 @@
       </p:sp>
       <p:sp>
         <p:nvSpPr>
-          <p:cNvPr id="1194241153" name="Номер слайда 3"/>
+          <p:cNvPr id="390911545" name="Номер слайда 3"/>
           <p:cNvSpPr>
             <a:spLocks noGrp="1"/>
           </p:cNvSpPr>
@@ -1468,7 +1468,7 @@
       </p:grpSpPr>
       <p:sp>
         <p:nvSpPr>
-          <p:cNvPr id="710506271" name="Образ слайда 1"/>
+          <p:cNvPr id="344374486" name="Образ слайда 1"/>
           <p:cNvSpPr>
             <a:spLocks noChangeAspect="1" noGrp="1" noRot="1"/>
           </p:cNvSpPr>
@@ -1480,7 +1480,7 @@
       </p:sp>
       <p:sp>
         <p:nvSpPr>
-          <p:cNvPr id="966404249" name="Заметки 2"/>
+          <p:cNvPr id="1080507705" name="Заметки 2"/>
           <p:cNvSpPr>
             <a:spLocks noGrp="1"/>
           </p:cNvSpPr>
@@ -1515,7 +1515,7 @@
       </p:sp>
       <p:sp>
         <p:nvSpPr>
-          <p:cNvPr id="1213067012" name="Номер слайда 3"/>
+          <p:cNvPr id="2041739096" name="Номер слайда 3"/>
           <p:cNvSpPr>
             <a:spLocks noGrp="1"/>
           </p:cNvSpPr>
@@ -1566,7 +1566,7 @@
       </p:grpSpPr>
       <p:sp>
         <p:nvSpPr>
-          <p:cNvPr id="1982573138" name="Образ слайда 1"/>
+          <p:cNvPr id="1036328120" name="Образ слайда 1"/>
           <p:cNvSpPr>
             <a:spLocks noChangeAspect="1" noGrp="1" noRot="1"/>
           </p:cNvSpPr>
@@ -1578,7 +1578,7 @@
       </p:sp>
       <p:sp>
         <p:nvSpPr>
-          <p:cNvPr id="1445696225" name="Заметки 2"/>
+          <p:cNvPr id="411039823" name="Заметки 2"/>
           <p:cNvSpPr>
             <a:spLocks noGrp="1"/>
           </p:cNvSpPr>
@@ -1613,7 +1613,7 @@
       </p:sp>
       <p:sp>
         <p:nvSpPr>
-          <p:cNvPr id="643531789" name="Номер слайда 3"/>
+          <p:cNvPr id="321800205" name="Номер слайда 3"/>
           <p:cNvSpPr>
             <a:spLocks noGrp="1"/>
           </p:cNvSpPr>
@@ -1664,7 +1664,7 @@
       </p:grpSpPr>
       <p:sp>
         <p:nvSpPr>
-          <p:cNvPr id="964890589" name="Holder 2"/>
+          <p:cNvPr id="1810117480" name="Holder 2"/>
           <p:cNvSpPr>
             <a:spLocks noGrp="1"/>
           </p:cNvSpPr>
@@ -1700,7 +1700,7 @@
       </p:sp>
       <p:sp>
         <p:nvSpPr>
-          <p:cNvPr id="703786766" name="Holder 3"/>
+          <p:cNvPr id="643372450" name="Holder 3"/>
           <p:cNvSpPr>
             <a:spLocks noGrp="1"/>
           </p:cNvSpPr>
@@ -1736,7 +1736,7 @@
       </p:sp>
       <p:sp>
         <p:nvSpPr>
-          <p:cNvPr id="2088544321" name="Holder 4"/>
+          <p:cNvPr id="1779092154" name="Holder 4"/>
           <p:cNvSpPr>
             <a:spLocks noGrp="1"/>
           </p:cNvSpPr>
@@ -1768,7 +1768,7 @@
       </p:sp>
       <p:sp>
         <p:nvSpPr>
-          <p:cNvPr id="366845937" name="Holder 5"/>
+          <p:cNvPr id="1411584922" name="Holder 5"/>
           <p:cNvSpPr>
             <a:spLocks noGrp="1"/>
           </p:cNvSpPr>
@@ -1804,7 +1804,7 @@
       </p:sp>
       <p:sp>
         <p:nvSpPr>
-          <p:cNvPr id="388094137" name="Holder 6"/>
+          <p:cNvPr id="1595790231" name="Holder 6"/>
           <p:cNvSpPr>
             <a:spLocks noGrp="1"/>
           </p:cNvSpPr>
@@ -1865,7 +1865,7 @@
       </p:grpSpPr>
       <p:sp>
         <p:nvSpPr>
-          <p:cNvPr id="1707991907" name="Holder 2"/>
+          <p:cNvPr id="1287908891" name="Holder 2"/>
           <p:cNvSpPr>
             <a:spLocks noGrp="1"/>
           </p:cNvSpPr>
@@ -1897,7 +1897,7 @@
       </p:sp>
       <p:sp>
         <p:nvSpPr>
-          <p:cNvPr id="2099908765" name="Holder 3"/>
+          <p:cNvPr id="1079085640" name="Holder 3"/>
           <p:cNvSpPr>
             <a:spLocks noGrp="1"/>
           </p:cNvSpPr>
@@ -1927,7 +1927,7 @@
       </p:sp>
       <p:sp>
         <p:nvSpPr>
-          <p:cNvPr id="1859158340" name="Holder 4"/>
+          <p:cNvPr id="1725731631" name="Holder 4"/>
           <p:cNvSpPr>
             <a:spLocks noGrp="1"/>
           </p:cNvSpPr>
@@ -1959,7 +1959,7 @@
       </p:sp>
       <p:sp>
         <p:nvSpPr>
-          <p:cNvPr id="1925534670" name="Holder 5"/>
+          <p:cNvPr id="211519320" name="Holder 5"/>
           <p:cNvSpPr>
             <a:spLocks noGrp="1"/>
           </p:cNvSpPr>
@@ -1995,7 +1995,7 @@
       </p:sp>
       <p:sp>
         <p:nvSpPr>
-          <p:cNvPr id="1079430836" name="Holder 6"/>
+          <p:cNvPr id="54924514" name="Holder 6"/>
           <p:cNvSpPr>
             <a:spLocks noGrp="1"/>
           </p:cNvSpPr>
@@ -2056,7 +2056,7 @@
       </p:grpSpPr>
       <p:sp>
         <p:nvSpPr>
-          <p:cNvPr id="1554114539" name="Holder 2"/>
+          <p:cNvPr id="199950807" name="Holder 2"/>
           <p:cNvSpPr>
             <a:spLocks noGrp="1"/>
           </p:cNvSpPr>
@@ -2088,7 +2088,7 @@
       </p:sp>
       <p:sp>
         <p:nvSpPr>
-          <p:cNvPr id="1087976817" name="Holder 3"/>
+          <p:cNvPr id="1683552086" name="Holder 3"/>
           <p:cNvSpPr>
             <a:spLocks noGrp="1"/>
           </p:cNvSpPr>
@@ -2124,7 +2124,7 @@
       </p:sp>
       <p:sp>
         <p:nvSpPr>
-          <p:cNvPr id="478820388" name="Holder 4"/>
+          <p:cNvPr id="1938172446" name="Holder 4"/>
           <p:cNvSpPr>
             <a:spLocks noGrp="1"/>
           </p:cNvSpPr>
@@ -2160,7 +2160,7 @@
       </p:sp>
       <p:sp>
         <p:nvSpPr>
-          <p:cNvPr id="999545516" name="Holder 5"/>
+          <p:cNvPr id="955751130" name="Holder 5"/>
           <p:cNvSpPr>
             <a:spLocks noGrp="1"/>
           </p:cNvSpPr>
@@ -2192,7 +2192,7 @@
       </p:sp>
       <p:sp>
         <p:nvSpPr>
-          <p:cNvPr id="627654485" name="Holder 6"/>
+          <p:cNvPr id="19386081" name="Holder 6"/>
           <p:cNvSpPr>
             <a:spLocks noGrp="1"/>
           </p:cNvSpPr>
@@ -2228,7 +2228,7 @@
       </p:sp>
       <p:sp>
         <p:nvSpPr>
-          <p:cNvPr id="129994954" name="Holder 7"/>
+          <p:cNvPr id="279829220" name="Holder 7"/>
           <p:cNvSpPr>
             <a:spLocks noGrp="1"/>
           </p:cNvSpPr>
@@ -2289,7 +2289,7 @@
       </p:grpSpPr>
       <p:sp>
         <p:nvSpPr>
-          <p:cNvPr id="2057537544" name="Holder 2"/>
+          <p:cNvPr id="728045644" name="Holder 2"/>
           <p:cNvSpPr>
             <a:spLocks noGrp="1"/>
           </p:cNvSpPr>
@@ -2321,7 +2321,7 @@
       </p:sp>
       <p:sp>
         <p:nvSpPr>
-          <p:cNvPr id="974254652" name="Holder 3"/>
+          <p:cNvPr id="520367485" name="Holder 3"/>
           <p:cNvSpPr>
             <a:spLocks noGrp="1"/>
           </p:cNvSpPr>
@@ -2353,7 +2353,7 @@
       </p:sp>
       <p:sp>
         <p:nvSpPr>
-          <p:cNvPr id="930206818" name="Holder 4"/>
+          <p:cNvPr id="1785316681" name="Holder 4"/>
           <p:cNvSpPr>
             <a:spLocks noGrp="1"/>
           </p:cNvSpPr>
@@ -2389,7 +2389,7 @@
       </p:sp>
       <p:sp>
         <p:nvSpPr>
-          <p:cNvPr id="2022816493" name="Holder 5"/>
+          <p:cNvPr id="714838257" name="Holder 5"/>
           <p:cNvSpPr>
             <a:spLocks noGrp="1"/>
           </p:cNvSpPr>
@@ -2457,7 +2457,7 @@
       </p:grpSpPr>
       <p:sp>
         <p:nvSpPr>
-          <p:cNvPr id="1657519105" name="Holder 2"/>
+          <p:cNvPr id="1650289435" name="Holder 2"/>
           <p:cNvSpPr>
             <a:spLocks noGrp="1"/>
           </p:cNvSpPr>
@@ -2489,7 +2489,7 @@
       </p:sp>
       <p:sp>
         <p:nvSpPr>
-          <p:cNvPr id="1293049203" name="Holder 3"/>
+          <p:cNvPr id="2086615517" name="Holder 3"/>
           <p:cNvSpPr>
             <a:spLocks noGrp="1"/>
           </p:cNvSpPr>
@@ -2525,7 +2525,7 @@
       </p:sp>
       <p:sp>
         <p:nvSpPr>
-          <p:cNvPr id="1457080696" name="Holder 4"/>
+          <p:cNvPr id="1275499396" name="Holder 4"/>
           <p:cNvSpPr>
             <a:spLocks noGrp="1"/>
           </p:cNvSpPr>
@@ -2593,7 +2593,7 @@
       </p:grpSpPr>
       <p:sp>
         <p:nvSpPr>
-          <p:cNvPr id="1588200642" name="bg object 16"/>
+          <p:cNvPr id="524615237" name="bg object 16"/>
           <p:cNvSpPr/>
           <p:nvPr/>
         </p:nvSpPr>
@@ -2623,7 +2623,7 @@
       </p:sp>
       <p:sp>
         <p:nvSpPr>
-          <p:cNvPr id="2102964530" name="Holder 2"/>
+          <p:cNvPr id="205027500" name="Holder 2"/>
           <p:cNvSpPr>
             <a:spLocks noGrp="1"/>
           </p:cNvSpPr>
@@ -2665,7 +2665,7 @@
       </p:sp>
       <p:sp>
         <p:nvSpPr>
-          <p:cNvPr id="71099285" name="Holder 3"/>
+          <p:cNvPr id="21125017" name="Holder 3"/>
           <p:cNvSpPr>
             <a:spLocks noGrp="1"/>
           </p:cNvSpPr>
@@ -2705,7 +2705,7 @@
       </p:sp>
       <p:sp>
         <p:nvSpPr>
-          <p:cNvPr id="724260328" name="Holder 4"/>
+          <p:cNvPr id="1663161472" name="Holder 4"/>
           <p:cNvSpPr>
             <a:spLocks noGrp="1"/>
           </p:cNvSpPr>
@@ -2747,7 +2747,7 @@
       </p:sp>
       <p:sp>
         <p:nvSpPr>
-          <p:cNvPr id="1729964214" name="Holder 5"/>
+          <p:cNvPr id="430495865" name="Holder 5"/>
           <p:cNvSpPr>
             <a:spLocks noGrp="1"/>
           </p:cNvSpPr>
@@ -2793,7 +2793,7 @@
       </p:sp>
       <p:sp>
         <p:nvSpPr>
-          <p:cNvPr id="690068770" name="Holder 6"/>
+          <p:cNvPr id="1382979614" name="Holder 6"/>
           <p:cNvSpPr>
             <a:spLocks noGrp="1"/>
           </p:cNvSpPr>
@@ -3017,7 +3017,7 @@
       </p:grpSpPr>
       <p:sp>
         <p:nvSpPr>
-          <p:cNvPr id="863996917" name="Прямоугольник 3"/>
+          <p:cNvPr id="255126324" name="Прямоугольник 3"/>
           <p:cNvSpPr/>
           <p:nvPr/>
         </p:nvSpPr>
@@ -3082,7 +3082,7 @@
       </p:sp>
       <p:pic>
         <p:nvPicPr>
-          <p:cNvPr id="947379649" name="Рисунок 2"/>
+          <p:cNvPr id="1380237286" name="Рисунок 2"/>
           <p:cNvPicPr>
             <a:picLocks noChangeAspect="1"/>
           </p:cNvPicPr>
@@ -3104,7 +3104,7 @@
       </p:pic>
       <p:sp>
         <p:nvSpPr>
-          <p:cNvPr id="1813083623" name="object 19"/>
+          <p:cNvPr id="1924739988" name="object 19"/>
           <p:cNvSpPr/>
           <p:nvPr/>
         </p:nvSpPr>
@@ -3164,7 +3164,7 @@
       </p:sp>
       <p:sp>
         <p:nvSpPr>
-          <p:cNvPr id="251639697" name="object 12"/>
+          <p:cNvPr id="2134564069" name="object 12"/>
           <p:cNvSpPr txBox="1"/>
           <p:nvPr/>
         </p:nvSpPr>
@@ -3404,7 +3404,7 @@
       </p:sp>
       <p:sp>
         <p:nvSpPr>
-          <p:cNvPr id="494040846" name="object 23"/>
+          <p:cNvPr id="1372934076" name="object 23"/>
           <p:cNvSpPr txBox="1">
             <a:spLocks noGrp="1"/>
           </p:cNvSpPr>
@@ -3489,7 +3489,7 @@
       </p:sp>
       <p:sp>
         <p:nvSpPr>
-          <p:cNvPr id="1247326267" name="object 9"/>
+          <p:cNvPr id="34203027" name="object 9"/>
           <p:cNvSpPr/>
           <p:nvPr/>
         </p:nvSpPr>
@@ -3519,7 +3519,7 @@
       </p:sp>
       <p:sp>
         <p:nvSpPr>
-          <p:cNvPr id="237369460" name="CustomShape 151"/>
+          <p:cNvPr id="188918546" name="CustomShape 151"/>
           <p:cNvSpPr>
             <a:spLocks noChangeAspect="1"/>
           </p:cNvSpPr>
@@ -3556,7 +3556,7 @@
       </p:sp>
       <p:sp>
         <p:nvSpPr>
-          <p:cNvPr id="531148124" name="TextBox 31"/>
+          <p:cNvPr id="409805342" name="TextBox 31"/>
           <p:cNvSpPr txBox="1"/>
           <p:nvPr/>
         </p:nvSpPr>
@@ -3631,7 +3631,7 @@
       </p:sp>
       <p:sp>
         <p:nvSpPr>
-          <p:cNvPr id="81501034" name="object 19"/>
+          <p:cNvPr id="725944603" name="object 19"/>
           <p:cNvSpPr/>
           <p:nvPr/>
         </p:nvSpPr>
@@ -3691,7 +3691,7 @@
       </p:sp>
       <p:sp>
         <p:nvSpPr>
-          <p:cNvPr id="369912432" name="object 19"/>
+          <p:cNvPr id="1820301310" name="object 19"/>
           <p:cNvSpPr/>
           <p:nvPr/>
         </p:nvSpPr>
@@ -3751,7 +3751,7 @@
       </p:sp>
       <p:pic>
         <p:nvPicPr>
-          <p:cNvPr id="800980457" name="Рисунок 15"/>
+          <p:cNvPr id="785579116" name="Рисунок 15"/>
           <p:cNvPicPr>
             <a:picLocks noChangeAspect="1"/>
           </p:cNvPicPr>
@@ -3773,7 +3773,7 @@
       </p:pic>
       <p:sp>
         <p:nvSpPr>
-          <p:cNvPr id="399010225" name="TextBox 16"/>
+          <p:cNvPr id="2085230409" name="TextBox 16"/>
           <p:cNvSpPr txBox="1"/>
           <p:nvPr/>
         </p:nvSpPr>
@@ -3896,7 +3896,7 @@
       </p:sp>
       <p:pic>
         <p:nvPicPr>
-          <p:cNvPr id="1389861357" name="Рисунок 867035233"/>
+          <p:cNvPr id="1537711085" name="Рисунок 867035233"/>
           <p:cNvPicPr>
             <a:picLocks noChangeAspect="1"/>
           </p:cNvPicPr>
@@ -3951,7 +3951,7 @@
       </p:grpSpPr>
       <p:sp>
         <p:nvSpPr>
-          <p:cNvPr id="341292942" name="object 6"/>
+          <p:cNvPr id="515406775" name="object 6"/>
           <p:cNvSpPr/>
           <p:nvPr/>
         </p:nvSpPr>
@@ -3996,7 +3996,7 @@
       </p:sp>
       <p:sp>
         <p:nvSpPr>
-          <p:cNvPr id="180841494" name="object 8"/>
+          <p:cNvPr id="2096787188" name="object 8"/>
           <p:cNvSpPr/>
           <p:nvPr/>
         </p:nvSpPr>
@@ -4049,7 +4049,7 @@
       </p:sp>
       <p:sp>
         <p:nvSpPr>
-          <p:cNvPr id="747412797" name="object 9"/>
+          <p:cNvPr id="499128126" name="object 9"/>
           <p:cNvSpPr txBox="1">
             <a:spLocks noGrp="1"/>
           </p:cNvSpPr>
@@ -4087,7 +4087,7 @@
       </p:sp>
       <p:sp>
         <p:nvSpPr>
-          <p:cNvPr id="162935611" name="AutoShape 2" descr="http://www.makler.su/catalog/ct/photo/c_b_17489.jpg"/>
+          <p:cNvPr id="289240835" name="AutoShape 2" descr="http://www.makler.su/catalog/ct/photo/c_b_17489.jpg"/>
           <p:cNvSpPr>
             <a:spLocks noChangeArrowheads="1" noChangeAspect="1"/>
           </p:cNvSpPr>
@@ -4118,7 +4118,7 @@
       </p:sp>
       <p:sp>
         <p:nvSpPr>
-          <p:cNvPr id="1363089168" name="TextBox 19"/>
+          <p:cNvPr id="70378418" name="TextBox 19"/>
           <p:cNvSpPr txBox="1"/>
           <p:nvPr/>
         </p:nvSpPr>
@@ -4443,7 +4443,7 @@
       </p:sp>
       <p:sp>
         <p:nvSpPr>
-          <p:cNvPr id="1212387074" name="object 104"/>
+          <p:cNvPr id="1911593050" name="object 104"/>
           <p:cNvSpPr/>
           <p:nvPr/>
         </p:nvSpPr>
@@ -4473,7 +4473,7 @@
       </p:sp>
       <p:sp>
         <p:nvSpPr>
-          <p:cNvPr id="1369207258" name="CustomShape 151"/>
+          <p:cNvPr id="734388720" name="CustomShape 151"/>
           <p:cNvSpPr/>
           <p:nvPr/>
         </p:nvSpPr>
@@ -4508,7 +4508,7 @@
       </p:sp>
       <p:sp>
         <p:nvSpPr>
-          <p:cNvPr id="1112821748" name="Номер слайда 3"/>
+          <p:cNvPr id="1503641889" name="Номер слайда 3"/>
           <p:cNvSpPr>
             <a:spLocks noGrp="1"/>
           </p:cNvSpPr>
@@ -4549,7 +4549,7 @@
       </p:sp>
       <p:pic>
         <p:nvPicPr>
-          <p:cNvPr id="1394379449" name="Рисунок 4"/>
+          <p:cNvPr id="1579127491" name="Рисунок 4"/>
           <p:cNvPicPr>
             <a:picLocks noChangeAspect="1"/>
           </p:cNvPicPr>
@@ -4571,7 +4571,7 @@
       </p:pic>
       <p:pic>
         <p:nvPicPr>
-          <p:cNvPr id="1756201803" name=""/>
+          <p:cNvPr id="1871490660" name=""/>
           <p:cNvPicPr>
             <a:picLocks noChangeAspect="1"/>
           </p:cNvPicPr>
@@ -4593,7 +4593,7 @@
       </p:pic>
       <p:pic>
         <p:nvPicPr>
-          <p:cNvPr id="882581135" name=""/>
+          <p:cNvPr id="1864053819" name=""/>
           <p:cNvPicPr>
             <a:picLocks noChangeAspect="1"/>
           </p:cNvPicPr>
@@ -4615,7 +4615,7 @@
       </p:pic>
       <p:pic>
         <p:nvPicPr>
-          <p:cNvPr id="24909196" name=""/>
+          <p:cNvPr id="1595991509" name=""/>
           <p:cNvPicPr>
             <a:picLocks noChangeAspect="1"/>
           </p:cNvPicPr>
@@ -4670,7 +4670,7 @@
       </p:grpSpPr>
       <p:sp>
         <p:nvSpPr>
-          <p:cNvPr id="373820019" name="object 6"/>
+          <p:cNvPr id="434551838" name="object 6"/>
           <p:cNvSpPr/>
           <p:nvPr/>
         </p:nvSpPr>
@@ -4715,7 +4715,7 @@
       </p:sp>
       <p:sp>
         <p:nvSpPr>
-          <p:cNvPr id="1866815986" name="object 8"/>
+          <p:cNvPr id="1303087736" name="object 8"/>
           <p:cNvSpPr/>
           <p:nvPr/>
         </p:nvSpPr>
@@ -4768,7 +4768,7 @@
       </p:sp>
       <p:sp>
         <p:nvSpPr>
-          <p:cNvPr id="1190430556" name="object 9"/>
+          <p:cNvPr id="19606897" name="object 9"/>
           <p:cNvSpPr txBox="1">
             <a:spLocks noGrp="1"/>
           </p:cNvSpPr>
@@ -4799,7 +4799,7 @@
       </p:sp>
       <p:sp>
         <p:nvSpPr>
-          <p:cNvPr id="1238282291" name="AutoShape 2" descr="http://www.makler.su/catalog/ct/photo/c_b_17489.jpg"/>
+          <p:cNvPr id="1670711338" name="AutoShape 2" descr="http://www.makler.su/catalog/ct/photo/c_b_17489.jpg"/>
           <p:cNvSpPr>
             <a:spLocks noChangeArrowheads="1" noChangeAspect="1"/>
           </p:cNvSpPr>
@@ -4830,7 +4830,7 @@
       </p:sp>
       <p:sp>
         <p:nvSpPr>
-          <p:cNvPr id="1128086601" name="object 104"/>
+          <p:cNvPr id="2066876315" name="object 104"/>
           <p:cNvSpPr/>
           <p:nvPr/>
         </p:nvSpPr>
@@ -4860,7 +4860,7 @@
       </p:sp>
       <p:sp>
         <p:nvSpPr>
-          <p:cNvPr id="839418679" name="CustomShape 151"/>
+          <p:cNvPr id="1636614880" name="CustomShape 151"/>
           <p:cNvSpPr/>
           <p:nvPr/>
         </p:nvSpPr>
@@ -4895,7 +4895,7 @@
       </p:sp>
       <p:sp>
         <p:nvSpPr>
-          <p:cNvPr id="1224476364" name="Номер слайда 3"/>
+          <p:cNvPr id="1133175010" name="Номер слайда 3"/>
           <p:cNvSpPr>
             <a:spLocks noGrp="1"/>
           </p:cNvSpPr>
@@ -4936,7 +4936,7 @@
       </p:sp>
       <p:pic>
         <p:nvPicPr>
-          <p:cNvPr id="203405117" name="Рисунок 4"/>
+          <p:cNvPr id="902296674" name="Рисунок 4"/>
           <p:cNvPicPr>
             <a:picLocks noChangeAspect="1"/>
           </p:cNvPicPr>
@@ -4958,14 +4958,14 @@
       </p:pic>
       <p:sp>
         <p:nvSpPr>
-          <p:cNvPr id="1540118963" name=""/>
+          <p:cNvPr id="755081711" name=""/>
           <p:cNvSpPr txBox="1"/>
           <p:nvPr/>
         </p:nvSpPr>
         <p:spPr bwMode="auto">
           <a:xfrm rot="0" flipH="0" flipV="0">
             <a:off x="1205791" y="1218012"/>
-            <a:ext cx="8670565" cy="3612239"/>
+            <a:ext cx="8670565" cy="3612238"/>
           </a:xfrm>
           <a:prstGeom prst="rect">
             <a:avLst/>
@@ -4977,7 +4977,7 @@
             <a:spAutoFit/>
           </a:bodyPr>
           <a:p>
-            <a:pPr indent="360044" algn="just">
+            <a:pPr indent="360043" algn="just">
               <a:lnSpc>
                 <a:spcPct val="150000"/>
               </a:lnSpc>
@@ -5062,7 +5062,7 @@
       </p:grpSpPr>
       <p:sp>
         <p:nvSpPr>
-          <p:cNvPr id="179619634" name="object 3"/>
+          <p:cNvPr id="1807090771" name="object 3"/>
           <p:cNvSpPr/>
           <p:nvPr/>
         </p:nvSpPr>
@@ -5092,7 +5092,7 @@
       </p:sp>
       <p:sp>
         <p:nvSpPr>
-          <p:cNvPr id="1715660511" name="object 4"/>
+          <p:cNvPr id="69894933" name="object 4"/>
           <p:cNvSpPr/>
           <p:nvPr/>
         </p:nvSpPr>
@@ -5531,7 +5531,7 @@
       </p:sp>
       <p:sp>
         <p:nvSpPr>
-          <p:cNvPr id="1632682354" name="object 5"/>
+          <p:cNvPr id="832086928" name="object 5"/>
           <p:cNvSpPr/>
           <p:nvPr/>
         </p:nvSpPr>
@@ -5584,7 +5584,7 @@
       </p:sp>
       <p:sp>
         <p:nvSpPr>
-          <p:cNvPr id="334696654" name="object 6"/>
+          <p:cNvPr id="1477387755" name="object 6"/>
           <p:cNvSpPr/>
           <p:nvPr/>
         </p:nvSpPr>
@@ -5637,7 +5637,7 @@
       </p:sp>
       <p:sp>
         <p:nvSpPr>
-          <p:cNvPr id="1382232085" name="object 7"/>
+          <p:cNvPr id="1154616573" name="object 7"/>
           <p:cNvSpPr/>
           <p:nvPr/>
         </p:nvSpPr>
@@ -5690,7 +5690,7 @@
       </p:sp>
       <p:sp>
         <p:nvSpPr>
-          <p:cNvPr id="208862450" name="object 9"/>
+          <p:cNvPr id="1154773485" name="object 9"/>
           <p:cNvSpPr/>
           <p:nvPr/>
         </p:nvSpPr>
@@ -5720,7 +5720,7 @@
       </p:sp>
       <p:sp>
         <p:nvSpPr>
-          <p:cNvPr id="1578100080" name="object 11"/>
+          <p:cNvPr id="1434384566" name="object 11"/>
           <p:cNvSpPr/>
           <p:nvPr/>
         </p:nvSpPr>
@@ -5750,7 +5750,7 @@
       </p:sp>
       <p:grpSp>
         <p:nvGrpSpPr>
-          <p:cNvPr id="1536607178" name="object 13"/>
+          <p:cNvPr id="2145430112" name="object 13"/>
           <p:cNvGrpSpPr/>
           <p:nvPr/>
         </p:nvGrpSpPr>
@@ -7131,7 +7131,7 @@
       </p:grpSp>
       <p:sp>
         <p:nvSpPr>
-          <p:cNvPr id="2067091754" name="object 12"/>
+          <p:cNvPr id="1923004845" name="object 12"/>
           <p:cNvSpPr txBox="1"/>
           <p:nvPr/>
         </p:nvSpPr>
@@ -7208,7 +7208,7 @@
       </p:sp>
       <p:sp>
         <p:nvSpPr>
-          <p:cNvPr id="15963631" name="CustomShape 151"/>
+          <p:cNvPr id="1100126176" name="CustomShape 151"/>
           <p:cNvSpPr>
             <a:spLocks noChangeAspect="1"/>
           </p:cNvSpPr>
@@ -7245,7 +7245,7 @@
       </p:sp>
       <p:pic>
         <p:nvPicPr>
-          <p:cNvPr id="1972664881" name="Рисунок 21"/>
+          <p:cNvPr id="916921004" name="Рисунок 21"/>
           <p:cNvPicPr>
             <a:picLocks noChangeAspect="1"/>
           </p:cNvPicPr>
@@ -7300,7 +7300,7 @@
       </p:grpSpPr>
       <p:sp>
         <p:nvSpPr>
-          <p:cNvPr id="1311175271" name="object 6"/>
+          <p:cNvPr id="1343897777" name="object 6"/>
           <p:cNvSpPr/>
           <p:nvPr/>
         </p:nvSpPr>
@@ -7345,7 +7345,7 @@
       </p:sp>
       <p:sp>
         <p:nvSpPr>
-          <p:cNvPr id="1832630872" name="object 8"/>
+          <p:cNvPr id="973143238" name="object 8"/>
           <p:cNvSpPr/>
           <p:nvPr/>
         </p:nvSpPr>
@@ -7398,7 +7398,7 @@
       </p:sp>
       <p:sp>
         <p:nvSpPr>
-          <p:cNvPr id="962519098" name="object 9"/>
+          <p:cNvPr id="1238721363" name="object 9"/>
           <p:cNvSpPr txBox="1">
             <a:spLocks noGrp="1"/>
           </p:cNvSpPr>
@@ -7429,7 +7429,7 @@
       </p:sp>
       <p:sp>
         <p:nvSpPr>
-          <p:cNvPr id="1712392243" name="AutoShape 2" descr="http://www.makler.su/catalog/ct/photo/c_b_17489.jpg"/>
+          <p:cNvPr id="599759186" name="AutoShape 2" descr="http://www.makler.su/catalog/ct/photo/c_b_17489.jpg"/>
           <p:cNvSpPr>
             <a:spLocks noChangeArrowheads="1" noChangeAspect="1"/>
           </p:cNvSpPr>
@@ -7460,7 +7460,7 @@
       </p:sp>
       <p:sp>
         <p:nvSpPr>
-          <p:cNvPr id="2087906667" name="TextBox 19"/>
+          <p:cNvPr id="330441225" name="TextBox 19"/>
           <p:cNvSpPr txBox="1"/>
           <p:nvPr/>
         </p:nvSpPr>
@@ -7626,7 +7626,7 @@
       </p:sp>
       <p:sp>
         <p:nvSpPr>
-          <p:cNvPr id="1002859773" name="object 104"/>
+          <p:cNvPr id="623463720" name="object 104"/>
           <p:cNvSpPr/>
           <p:nvPr/>
         </p:nvSpPr>
@@ -7656,7 +7656,7 @@
       </p:sp>
       <p:sp>
         <p:nvSpPr>
-          <p:cNvPr id="1215069499" name="CustomShape 151"/>
+          <p:cNvPr id="1676727564" name="CustomShape 151"/>
           <p:cNvSpPr/>
           <p:nvPr/>
         </p:nvSpPr>
@@ -7691,7 +7691,7 @@
       </p:sp>
       <p:sp>
         <p:nvSpPr>
-          <p:cNvPr id="249364046" name="Номер слайда 3"/>
+          <p:cNvPr id="534040982" name="Номер слайда 3"/>
           <p:cNvSpPr>
             <a:spLocks noGrp="1"/>
           </p:cNvSpPr>
@@ -7732,7 +7732,7 @@
       </p:sp>
       <p:pic>
         <p:nvPicPr>
-          <p:cNvPr id="2034740809" name="Рисунок 4"/>
+          <p:cNvPr id="277981654" name="Рисунок 4"/>
           <p:cNvPicPr>
             <a:picLocks noChangeAspect="1"/>
           </p:cNvPicPr>
@@ -7787,7 +7787,7 @@
       </p:grpSpPr>
       <p:sp>
         <p:nvSpPr>
-          <p:cNvPr id="2114007003" name="object 6"/>
+          <p:cNvPr id="1594148653" name="object 6"/>
           <p:cNvSpPr/>
           <p:nvPr/>
         </p:nvSpPr>
@@ -7832,7 +7832,7 @@
       </p:sp>
       <p:sp>
         <p:nvSpPr>
-          <p:cNvPr id="218850298" name="object 8"/>
+          <p:cNvPr id="1049220714" name="object 8"/>
           <p:cNvSpPr/>
           <p:nvPr/>
         </p:nvSpPr>
@@ -7885,7 +7885,7 @@
       </p:sp>
       <p:sp>
         <p:nvSpPr>
-          <p:cNvPr id="1132082480" name="object 9"/>
+          <p:cNvPr id="744522326" name="object 9"/>
           <p:cNvSpPr txBox="1">
             <a:spLocks noGrp="1"/>
           </p:cNvSpPr>
@@ -7916,7 +7916,7 @@
       </p:sp>
       <p:sp>
         <p:nvSpPr>
-          <p:cNvPr id="764125963" name="AutoShape 2" descr="http://www.makler.su/catalog/ct/photo/c_b_17489.jpg"/>
+          <p:cNvPr id="2047868327" name="AutoShape 2" descr="http://www.makler.su/catalog/ct/photo/c_b_17489.jpg"/>
           <p:cNvSpPr>
             <a:spLocks noChangeArrowheads="1" noChangeAspect="1"/>
           </p:cNvSpPr>
@@ -7947,7 +7947,7 @@
       </p:sp>
       <p:sp>
         <p:nvSpPr>
-          <p:cNvPr id="753187972" name="TextBox 19"/>
+          <p:cNvPr id="110986444" name="TextBox 19"/>
           <p:cNvSpPr txBox="1"/>
           <p:nvPr/>
         </p:nvSpPr>
@@ -8190,7 +8190,7 @@
       </p:sp>
       <p:sp>
         <p:nvSpPr>
-          <p:cNvPr id="1800519491" name="object 104"/>
+          <p:cNvPr id="1042058202" name="object 104"/>
           <p:cNvSpPr/>
           <p:nvPr/>
         </p:nvSpPr>
@@ -8220,7 +8220,7 @@
       </p:sp>
       <p:sp>
         <p:nvSpPr>
-          <p:cNvPr id="346272844" name="CustomShape 151"/>
+          <p:cNvPr id="1126528793" name="CustomShape 151"/>
           <p:cNvSpPr/>
           <p:nvPr/>
         </p:nvSpPr>
@@ -8255,7 +8255,7 @@
       </p:sp>
       <p:sp>
         <p:nvSpPr>
-          <p:cNvPr id="341370355" name="Номер слайда 3"/>
+          <p:cNvPr id="513501225" name="Номер слайда 3"/>
           <p:cNvSpPr>
             <a:spLocks noGrp="1"/>
           </p:cNvSpPr>
@@ -8296,7 +8296,7 @@
       </p:sp>
       <p:pic>
         <p:nvPicPr>
-          <p:cNvPr id="640454203" name="Рисунок 4"/>
+          <p:cNvPr id="87852545" name="Рисунок 4"/>
           <p:cNvPicPr>
             <a:picLocks noChangeAspect="1"/>
           </p:cNvPicPr>
@@ -8351,7 +8351,7 @@
       </p:grpSpPr>
       <p:sp>
         <p:nvSpPr>
-          <p:cNvPr id="716176243" name="object 6"/>
+          <p:cNvPr id="519315721" name="object 6"/>
           <p:cNvSpPr/>
           <p:nvPr/>
         </p:nvSpPr>
@@ -8396,7 +8396,7 @@
       </p:sp>
       <p:sp>
         <p:nvSpPr>
-          <p:cNvPr id="1109009918" name="object 8"/>
+          <p:cNvPr id="1542906878" name="object 8"/>
           <p:cNvSpPr/>
           <p:nvPr/>
         </p:nvSpPr>
@@ -8449,7 +8449,7 @@
       </p:sp>
       <p:sp>
         <p:nvSpPr>
-          <p:cNvPr id="2108804834" name="object 9"/>
+          <p:cNvPr id="559631225" name="object 9"/>
           <p:cNvSpPr txBox="1">
             <a:spLocks noGrp="1"/>
           </p:cNvSpPr>
@@ -8480,7 +8480,7 @@
       </p:sp>
       <p:sp>
         <p:nvSpPr>
-          <p:cNvPr id="1859480967" name="AutoShape 2" descr="http://www.makler.su/catalog/ct/photo/c_b_17489.jpg"/>
+          <p:cNvPr id="1927623255" name="AutoShape 2" descr="http://www.makler.su/catalog/ct/photo/c_b_17489.jpg"/>
           <p:cNvSpPr>
             <a:spLocks noChangeArrowheads="1" noChangeAspect="1"/>
           </p:cNvSpPr>
@@ -8511,7 +8511,7 @@
       </p:sp>
       <p:sp>
         <p:nvSpPr>
-          <p:cNvPr id="954679747" name="TextBox 19"/>
+          <p:cNvPr id="796924170" name="TextBox 19"/>
           <p:cNvSpPr txBox="1"/>
           <p:nvPr/>
         </p:nvSpPr>
@@ -8813,7 +8813,7 @@
       </p:sp>
       <p:sp>
         <p:nvSpPr>
-          <p:cNvPr id="1845563286" name="object 104"/>
+          <p:cNvPr id="442103662" name="object 104"/>
           <p:cNvSpPr/>
           <p:nvPr/>
         </p:nvSpPr>
@@ -8843,7 +8843,7 @@
       </p:sp>
       <p:sp>
         <p:nvSpPr>
-          <p:cNvPr id="937089970" name="CustomShape 151"/>
+          <p:cNvPr id="44800038" name="CustomShape 151"/>
           <p:cNvSpPr/>
           <p:nvPr/>
         </p:nvSpPr>
@@ -8878,7 +8878,7 @@
       </p:sp>
       <p:sp>
         <p:nvSpPr>
-          <p:cNvPr id="212094855" name="Номер слайда 3"/>
+          <p:cNvPr id="1646125660" name="Номер слайда 3"/>
           <p:cNvSpPr>
             <a:spLocks noGrp="1"/>
           </p:cNvSpPr>
@@ -8919,7 +8919,7 @@
       </p:sp>
       <p:pic>
         <p:nvPicPr>
-          <p:cNvPr id="668944569" name="Рисунок 4"/>
+          <p:cNvPr id="2004934917" name="Рисунок 4"/>
           <p:cNvPicPr>
             <a:picLocks noChangeAspect="1"/>
           </p:cNvPicPr>
@@ -8941,7 +8941,7 @@
       </p:pic>
       <p:pic>
         <p:nvPicPr>
-          <p:cNvPr id="1890302565" name=""/>
+          <p:cNvPr id="1047292543" name=""/>
           <p:cNvPicPr>
             <a:picLocks noChangeAspect="1"/>
           </p:cNvPicPr>
@@ -8963,7 +8963,7 @@
       </p:pic>
       <p:pic>
         <p:nvPicPr>
-          <p:cNvPr id="1723427324" name=""/>
+          <p:cNvPr id="229032404" name=""/>
           <p:cNvPicPr>
             <a:picLocks noChangeAspect="1"/>
           </p:cNvPicPr>
@@ -9018,7 +9018,7 @@
       </p:grpSpPr>
       <p:sp>
         <p:nvSpPr>
-          <p:cNvPr id="667137185" name="object 6"/>
+          <p:cNvPr id="1104821193" name="object 6"/>
           <p:cNvSpPr/>
           <p:nvPr/>
         </p:nvSpPr>
@@ -9063,7 +9063,7 @@
       </p:sp>
       <p:sp>
         <p:nvSpPr>
-          <p:cNvPr id="930451618" name="object 8"/>
+          <p:cNvPr id="352797192" name="object 8"/>
           <p:cNvSpPr/>
           <p:nvPr/>
         </p:nvSpPr>
@@ -9116,7 +9116,7 @@
       </p:sp>
       <p:sp>
         <p:nvSpPr>
-          <p:cNvPr id="1806769326" name="object 9"/>
+          <p:cNvPr id="181032730" name="object 9"/>
           <p:cNvSpPr txBox="1">
             <a:spLocks noGrp="1"/>
           </p:cNvSpPr>
@@ -9155,7 +9155,7 @@
       </p:sp>
       <p:sp>
         <p:nvSpPr>
-          <p:cNvPr id="935418760" name="AutoShape 2" descr="http://www.makler.su/catalog/ct/photo/c_b_17489.jpg"/>
+          <p:cNvPr id="1504368827" name="AutoShape 2" descr="http://www.makler.su/catalog/ct/photo/c_b_17489.jpg"/>
           <p:cNvSpPr>
             <a:spLocks noChangeArrowheads="1" noChangeAspect="1"/>
           </p:cNvSpPr>
@@ -9186,7 +9186,7 @@
       </p:sp>
       <p:sp>
         <p:nvSpPr>
-          <p:cNvPr id="830854059" name="TextBox 19"/>
+          <p:cNvPr id="1147393500" name="TextBox 19"/>
           <p:cNvSpPr txBox="1"/>
           <p:nvPr/>
         </p:nvSpPr>
@@ -9398,7 +9398,7 @@
       </p:sp>
       <p:sp>
         <p:nvSpPr>
-          <p:cNvPr id="1047350504" name="object 104"/>
+          <p:cNvPr id="1190777702" name="object 104"/>
           <p:cNvSpPr/>
           <p:nvPr/>
         </p:nvSpPr>
@@ -9428,7 +9428,7 @@
       </p:sp>
       <p:sp>
         <p:nvSpPr>
-          <p:cNvPr id="778042660" name="CustomShape 151"/>
+          <p:cNvPr id="615944789" name="CustomShape 151"/>
           <p:cNvSpPr/>
           <p:nvPr/>
         </p:nvSpPr>
@@ -9463,7 +9463,7 @@
       </p:sp>
       <p:sp>
         <p:nvSpPr>
-          <p:cNvPr id="37225103" name="Номер слайда 3"/>
+          <p:cNvPr id="31904490" name="Номер слайда 3"/>
           <p:cNvSpPr>
             <a:spLocks noGrp="1"/>
           </p:cNvSpPr>
@@ -9504,7 +9504,7 @@
       </p:sp>
       <p:pic>
         <p:nvPicPr>
-          <p:cNvPr id="213440233" name="Рисунок 4"/>
+          <p:cNvPr id="1451813836" name="Рисунок 4"/>
           <p:cNvPicPr>
             <a:picLocks noChangeAspect="1"/>
           </p:cNvPicPr>
@@ -9526,7 +9526,7 @@
       </p:pic>
       <p:pic>
         <p:nvPicPr>
-          <p:cNvPr id="905890183" name="Рисунок 10"/>
+          <p:cNvPr id="1905596540" name="Рисунок 10"/>
           <p:cNvPicPr/>
           <p:nvPr/>
         </p:nvPicPr>
@@ -9546,7 +9546,7 @@
       </p:pic>
       <p:pic>
         <p:nvPicPr>
-          <p:cNvPr id="1500574694" name="Рисунок 11"/>
+          <p:cNvPr id="1691901286" name="Рисунок 11"/>
           <p:cNvPicPr/>
           <p:nvPr/>
         </p:nvPicPr>
@@ -9599,7 +9599,7 @@
       </p:grpSpPr>
       <p:sp>
         <p:nvSpPr>
-          <p:cNvPr id="1131149545" name="object 6"/>
+          <p:cNvPr id="1937088597" name="object 6"/>
           <p:cNvSpPr/>
           <p:nvPr/>
         </p:nvSpPr>
@@ -9644,7 +9644,7 @@
       </p:sp>
       <p:sp>
         <p:nvSpPr>
-          <p:cNvPr id="1935113073" name="object 8"/>
+          <p:cNvPr id="298638886" name="object 8"/>
           <p:cNvSpPr/>
           <p:nvPr/>
         </p:nvSpPr>
@@ -9697,7 +9697,7 @@
       </p:sp>
       <p:sp>
         <p:nvSpPr>
-          <p:cNvPr id="1984959351" name="object 9"/>
+          <p:cNvPr id="979574510" name="object 9"/>
           <p:cNvSpPr txBox="1">
             <a:spLocks noGrp="1"/>
           </p:cNvSpPr>
@@ -9728,7 +9728,7 @@
       </p:sp>
       <p:sp>
         <p:nvSpPr>
-          <p:cNvPr id="897403483" name="AutoShape 2" descr="http://www.makler.su/catalog/ct/photo/c_b_17489.jpg"/>
+          <p:cNvPr id="951559685" name="AutoShape 2" descr="http://www.makler.su/catalog/ct/photo/c_b_17489.jpg"/>
           <p:cNvSpPr>
             <a:spLocks noChangeArrowheads="1" noChangeAspect="1"/>
           </p:cNvSpPr>
@@ -9759,7 +9759,7 @@
       </p:sp>
       <p:sp>
         <p:nvSpPr>
-          <p:cNvPr id="1261853767" name="TextBox 19"/>
+          <p:cNvPr id="866935752" name="TextBox 19"/>
           <p:cNvSpPr txBox="1"/>
           <p:nvPr/>
         </p:nvSpPr>
@@ -9889,7 +9889,7 @@
       </p:sp>
       <p:sp>
         <p:nvSpPr>
-          <p:cNvPr id="1759917830" name="object 104"/>
+          <p:cNvPr id="1740614946" name="object 104"/>
           <p:cNvSpPr/>
           <p:nvPr/>
         </p:nvSpPr>
@@ -9919,7 +9919,7 @@
       </p:sp>
       <p:sp>
         <p:nvSpPr>
-          <p:cNvPr id="2085785291" name="CustomShape 151"/>
+          <p:cNvPr id="478331092" name="CustomShape 151"/>
           <p:cNvSpPr/>
           <p:nvPr/>
         </p:nvSpPr>
@@ -9954,7 +9954,7 @@
       </p:sp>
       <p:sp>
         <p:nvSpPr>
-          <p:cNvPr id="971984584" name="Номер слайда 3"/>
+          <p:cNvPr id="2119407810" name="Номер слайда 3"/>
           <p:cNvSpPr>
             <a:spLocks noGrp="1"/>
           </p:cNvSpPr>
@@ -9995,7 +9995,7 @@
       </p:sp>
       <p:pic>
         <p:nvPicPr>
-          <p:cNvPr id="2075682402" name="Рисунок 4"/>
+          <p:cNvPr id="1931806609" name="Рисунок 4"/>
           <p:cNvPicPr>
             <a:picLocks noChangeAspect="1"/>
           </p:cNvPicPr>
@@ -10017,7 +10017,7 @@
       </p:pic>
       <p:pic>
         <p:nvPicPr>
-          <p:cNvPr id="317047439" name="Рисунок 16"/>
+          <p:cNvPr id="973197984" name="Рисунок 16"/>
           <p:cNvPicPr/>
           <p:nvPr/>
         </p:nvPicPr>
@@ -10071,7 +10071,7 @@
       </p:grpSpPr>
       <p:sp>
         <p:nvSpPr>
-          <p:cNvPr id="573063443" name="object 6"/>
+          <p:cNvPr id="41983494" name="object 6"/>
           <p:cNvSpPr/>
           <p:nvPr/>
         </p:nvSpPr>
@@ -10116,7 +10116,7 @@
       </p:sp>
       <p:sp>
         <p:nvSpPr>
-          <p:cNvPr id="1508316218" name="object 8"/>
+          <p:cNvPr id="958954277" name="object 8"/>
           <p:cNvSpPr/>
           <p:nvPr/>
         </p:nvSpPr>
@@ -10169,7 +10169,7 @@
       </p:sp>
       <p:sp>
         <p:nvSpPr>
-          <p:cNvPr id="1961969770" name="object 9"/>
+          <p:cNvPr id="791057742" name="object 9"/>
           <p:cNvSpPr txBox="1">
             <a:spLocks noGrp="1"/>
           </p:cNvSpPr>
@@ -10208,7 +10208,7 @@
       </p:sp>
       <p:sp>
         <p:nvSpPr>
-          <p:cNvPr id="491822145" name="AutoShape 2" descr="http://www.makler.su/catalog/ct/photo/c_b_17489.jpg"/>
+          <p:cNvPr id="684158273" name="AutoShape 2" descr="http://www.makler.su/catalog/ct/photo/c_b_17489.jpg"/>
           <p:cNvSpPr>
             <a:spLocks noChangeArrowheads="1" noChangeAspect="1"/>
           </p:cNvSpPr>
@@ -10239,7 +10239,7 @@
       </p:sp>
       <p:sp>
         <p:nvSpPr>
-          <p:cNvPr id="200822157" name="TextBox 19"/>
+          <p:cNvPr id="1530086032" name="TextBox 19"/>
           <p:cNvSpPr txBox="1"/>
           <p:nvPr/>
         </p:nvSpPr>
@@ -10454,7 +10454,7 @@
       </p:sp>
       <p:sp>
         <p:nvSpPr>
-          <p:cNvPr id="2129832659" name="object 104"/>
+          <p:cNvPr id="847570611" name="object 104"/>
           <p:cNvSpPr/>
           <p:nvPr/>
         </p:nvSpPr>
@@ -10484,7 +10484,7 @@
       </p:sp>
       <p:sp>
         <p:nvSpPr>
-          <p:cNvPr id="1660397208" name="CustomShape 151"/>
+          <p:cNvPr id="1090324214" name="CustomShape 151"/>
           <p:cNvSpPr/>
           <p:nvPr/>
         </p:nvSpPr>
@@ -10519,7 +10519,7 @@
       </p:sp>
       <p:sp>
         <p:nvSpPr>
-          <p:cNvPr id="797032085" name="Номер слайда 3"/>
+          <p:cNvPr id="316559673" name="Номер слайда 3"/>
           <p:cNvSpPr>
             <a:spLocks noGrp="1"/>
           </p:cNvSpPr>
@@ -10560,7 +10560,7 @@
       </p:sp>
       <p:pic>
         <p:nvPicPr>
-          <p:cNvPr id="351380094" name="Рисунок 4"/>
+          <p:cNvPr id="457054057" name="Рисунок 4"/>
           <p:cNvPicPr>
             <a:picLocks noChangeAspect="1"/>
           </p:cNvPicPr>
@@ -10582,7 +10582,7 @@
       </p:pic>
       <p:sp>
         <p:nvSpPr>
-          <p:cNvPr id="960332343" name="Прямоугольник 13"/>
+          <p:cNvPr id="347483871" name="Прямоугольник 13"/>
           <p:cNvSpPr/>
           <p:nvPr/>
         </p:nvSpPr>
@@ -10622,7 +10622,7 @@
       </p:sp>
       <p:pic>
         <p:nvPicPr>
-          <p:cNvPr id="1018258721" name="Рисунок 14"/>
+          <p:cNvPr id="1260681618" name="Рисунок 14"/>
           <p:cNvPicPr/>
           <p:nvPr/>
         </p:nvPicPr>
@@ -10643,7 +10643,7 @@
       </p:pic>
       <p:sp>
         <p:nvSpPr>
-          <p:cNvPr id="585124342" name="Прямоугольник 15"/>
+          <p:cNvPr id="1941422329" name="Прямоугольник 15"/>
           <p:cNvSpPr/>
           <p:nvPr/>
         </p:nvSpPr>
@@ -10683,7 +10683,7 @@
       </p:sp>
       <p:pic>
         <p:nvPicPr>
-          <p:cNvPr id="1775688459" name="Рисунок 16"/>
+          <p:cNvPr id="1229342034" name="Рисунок 16"/>
           <p:cNvPicPr/>
           <p:nvPr/>
         </p:nvPicPr>
@@ -10737,7 +10737,7 @@
       </p:grpSpPr>
       <p:sp>
         <p:nvSpPr>
-          <p:cNvPr id="695152375" name="object 6"/>
+          <p:cNvPr id="509190277" name="object 6"/>
           <p:cNvSpPr/>
           <p:nvPr/>
         </p:nvSpPr>
@@ -10782,7 +10782,7 @@
       </p:sp>
       <p:sp>
         <p:nvSpPr>
-          <p:cNvPr id="1493023859" name="object 8"/>
+          <p:cNvPr id="1143786901" name="object 8"/>
           <p:cNvSpPr/>
           <p:nvPr/>
         </p:nvSpPr>
@@ -10835,7 +10835,7 @@
       </p:sp>
       <p:sp>
         <p:nvSpPr>
-          <p:cNvPr id="596565901" name="object 9"/>
+          <p:cNvPr id="24147872" name="object 9"/>
           <p:cNvSpPr txBox="1">
             <a:spLocks noGrp="1"/>
           </p:cNvSpPr>
@@ -10876,7 +10876,7 @@
       </p:sp>
       <p:sp>
         <p:nvSpPr>
-          <p:cNvPr id="1125328862" name="AutoShape 2" descr="http://www.makler.su/catalog/ct/photo/c_b_17489.jpg"/>
+          <p:cNvPr id="264258661" name="AutoShape 2" descr="http://www.makler.su/catalog/ct/photo/c_b_17489.jpg"/>
           <p:cNvSpPr>
             <a:spLocks noChangeArrowheads="1" noChangeAspect="1"/>
           </p:cNvSpPr>
@@ -10907,7 +10907,7 @@
       </p:sp>
       <p:sp>
         <p:nvSpPr>
-          <p:cNvPr id="702440038" name="TextBox 19"/>
+          <p:cNvPr id="1736519043" name="TextBox 19"/>
           <p:cNvSpPr txBox="1"/>
           <p:nvPr/>
         </p:nvSpPr>
@@ -11218,7 +11218,7 @@
       </p:sp>
       <p:sp>
         <p:nvSpPr>
-          <p:cNvPr id="2004525897" name="object 104"/>
+          <p:cNvPr id="1150292156" name="object 104"/>
           <p:cNvSpPr/>
           <p:nvPr/>
         </p:nvSpPr>
@@ -11248,7 +11248,7 @@
       </p:sp>
       <p:sp>
         <p:nvSpPr>
-          <p:cNvPr id="2143734671" name="CustomShape 151"/>
+          <p:cNvPr id="1130043208" name="CustomShape 151"/>
           <p:cNvSpPr/>
           <p:nvPr/>
         </p:nvSpPr>
@@ -11283,7 +11283,7 @@
       </p:sp>
       <p:sp>
         <p:nvSpPr>
-          <p:cNvPr id="815840580" name="Номер слайда 3"/>
+          <p:cNvPr id="175521235" name="Номер слайда 3"/>
           <p:cNvSpPr>
             <a:spLocks noGrp="1"/>
           </p:cNvSpPr>
@@ -11324,7 +11324,7 @@
       </p:sp>
       <p:pic>
         <p:nvPicPr>
-          <p:cNvPr id="1780992868" name="Рисунок 4"/>
+          <p:cNvPr id="543747356" name="Рисунок 4"/>
           <p:cNvPicPr>
             <a:picLocks noChangeAspect="1"/>
           </p:cNvPicPr>
@@ -11346,7 +11346,7 @@
       </p:pic>
       <p:pic>
         <p:nvPicPr>
-          <p:cNvPr id="1257148619" name=""/>
+          <p:cNvPr id="1075929804" name=""/>
           <p:cNvPicPr>
             <a:picLocks noChangeAspect="1"/>
           </p:cNvPicPr>
@@ -11401,7 +11401,7 @@
       </p:grpSpPr>
       <p:sp>
         <p:nvSpPr>
-          <p:cNvPr id="1082642824" name="object 6"/>
+          <p:cNvPr id="1401103074" name="object 6"/>
           <p:cNvSpPr/>
           <p:nvPr/>
         </p:nvSpPr>
@@ -11446,7 +11446,7 @@
       </p:sp>
       <p:sp>
         <p:nvSpPr>
-          <p:cNvPr id="1077048437" name="object 8"/>
+          <p:cNvPr id="705901758" name="object 8"/>
           <p:cNvSpPr/>
           <p:nvPr/>
         </p:nvSpPr>
@@ -11499,7 +11499,7 @@
       </p:sp>
       <p:sp>
         <p:nvSpPr>
-          <p:cNvPr id="1870002111" name="object 9"/>
+          <p:cNvPr id="1111383351" name="object 9"/>
           <p:cNvSpPr txBox="1">
             <a:spLocks noGrp="1"/>
           </p:cNvSpPr>
@@ -11537,7 +11537,7 @@
       </p:sp>
       <p:sp>
         <p:nvSpPr>
-          <p:cNvPr id="228076907" name="AutoShape 2" descr="http://www.makler.su/catalog/ct/photo/c_b_17489.jpg"/>
+          <p:cNvPr id="436952980" name="AutoShape 2" descr="http://www.makler.su/catalog/ct/photo/c_b_17489.jpg"/>
           <p:cNvSpPr>
             <a:spLocks noChangeArrowheads="1" noChangeAspect="1"/>
           </p:cNvSpPr>
@@ -11568,14 +11568,14 @@
       </p:sp>
       <p:sp>
         <p:nvSpPr>
-          <p:cNvPr id="300687675" name="TextBox 19"/>
+          <p:cNvPr id="2125864798" name="TextBox 19"/>
           <p:cNvSpPr txBox="1"/>
           <p:nvPr/>
         </p:nvSpPr>
         <p:spPr bwMode="auto">
           <a:xfrm>
-            <a:off x="164646" y="675897"/>
-            <a:ext cx="7182494" cy="5029560"/>
+            <a:off x="164646" y="675896"/>
+            <a:ext cx="7184653" cy="5029560"/>
           </a:xfrm>
           <a:prstGeom prst="rect">
             <a:avLst/>
@@ -11647,7 +11647,7 @@
                 <a:ea typeface="Times New Roman"/>
                 <a:cs typeface="Times New Roman"/>
               </a:rPr>
-              <a:t>Internal App (БД, 1С) — изолирован</a:t>
+              <a:t>Internal App (БД) — изолирован</a:t>
             </a:r>
             <a:endParaRPr sz="2200"/>
           </a:p>
@@ -11816,7 +11816,7 @@
       </p:sp>
       <p:sp>
         <p:nvSpPr>
-          <p:cNvPr id="1273838428" name="object 104"/>
+          <p:cNvPr id="494736739" name="object 104"/>
           <p:cNvSpPr/>
           <p:nvPr/>
         </p:nvSpPr>
@@ -11846,7 +11846,7 @@
       </p:sp>
       <p:sp>
         <p:nvSpPr>
-          <p:cNvPr id="184932629" name="CustomShape 151"/>
+          <p:cNvPr id="2030170467" name="CustomShape 151"/>
           <p:cNvSpPr/>
           <p:nvPr/>
         </p:nvSpPr>
@@ -11881,7 +11881,7 @@
       </p:sp>
       <p:sp>
         <p:nvSpPr>
-          <p:cNvPr id="719450525" name="Номер слайда 3"/>
+          <p:cNvPr id="441139880" name="Номер слайда 3"/>
           <p:cNvSpPr>
             <a:spLocks noGrp="1"/>
           </p:cNvSpPr>
@@ -11922,7 +11922,7 @@
       </p:sp>
       <p:pic>
         <p:nvPicPr>
-          <p:cNvPr id="557358378" name="Рисунок 4"/>
+          <p:cNvPr id="1133430661" name="Рисунок 4"/>
           <p:cNvPicPr>
             <a:picLocks noChangeAspect="1"/>
           </p:cNvPicPr>
@@ -11944,7 +11944,7 @@
       </p:pic>
       <p:pic>
         <p:nvPicPr>
-          <p:cNvPr id="525804322" name=""/>
+          <p:cNvPr id="1960814769" name=""/>
           <p:cNvPicPr>
             <a:picLocks noChangeAspect="1"/>
           </p:cNvPicPr>
@@ -11956,8 +11956,8 @@
         </p:blipFill>
         <p:spPr bwMode="auto">
           <a:xfrm flipH="0" flipV="0">
-            <a:off x="4352658" y="454024"/>
-            <a:ext cx="3099188" cy="2062369"/>
+            <a:off x="5890955" y="454024"/>
+            <a:ext cx="2673265" cy="2252201"/>
           </a:xfrm>
           <a:prstGeom prst="rect">
             <a:avLst/>
@@ -11966,7 +11966,7 @@
       </p:pic>
       <p:pic>
         <p:nvPicPr>
-          <p:cNvPr id="690835557" name=""/>
+          <p:cNvPr id="1894601170" name=""/>
           <p:cNvPicPr>
             <a:picLocks noChangeAspect="1"/>
           </p:cNvPicPr>
@@ -11978,29 +11978,7 @@
         </p:blipFill>
         <p:spPr bwMode="auto">
           <a:xfrm flipH="0" flipV="0">
-            <a:off x="7282434" y="1532949"/>
-            <a:ext cx="2673265" cy="2252201"/>
-          </a:xfrm>
-          <a:prstGeom prst="rect">
-            <a:avLst/>
-          </a:prstGeom>
-        </p:spPr>
-      </p:pic>
-      <p:pic>
-        <p:nvPicPr>
-          <p:cNvPr id="1185360481" name=""/>
-          <p:cNvPicPr>
-            <a:picLocks noChangeAspect="1"/>
-          </p:cNvPicPr>
-          <p:nvPr/>
-        </p:nvPicPr>
-        <p:blipFill>
-          <a:blip r:embed="rId8"/>
-          <a:stretch/>
-        </p:blipFill>
-        <p:spPr bwMode="auto">
-          <a:xfrm flipH="0" flipV="0">
-            <a:off x="5692424" y="3708132"/>
+            <a:off x="6070617" y="3190676"/>
             <a:ext cx="3518846" cy="1997324"/>
           </a:xfrm>
           <a:prstGeom prst="rect">
